--- a/public/samples/pitch-deck.pptx
+++ b/public/samples/pitch-deck.pptx
@@ -8,6 +8,10 @@
     <p:sldId id="256" r:id="rId2"/>
     <p:sldId id="257" r:id="rId3"/>
     <p:sldId id="258" r:id="rId4"/>
+    <p:sldId id="259" r:id="rId5"/>
+    <p:sldId id="260" r:id="rId6"/>
+    <p:sldId id="261" r:id="rId7"/>
+    <p:sldId id="262" r:id="rId8"/>
   </p:sldIdLst>
   <p:sldSz cx="9144000" cy="6858000"/>
   <p:notesSz cx="6858000" cy="9144000"/>
@@ -63,24 +67,64 @@
       <p:grpSpPr/>
       <p:sp>
         <p:nvSpPr>
-          <p:cNvPr id="2" name="Title"/>
+          <p:cNvPr id="2" name="Rect"/>
           <p:cNvSpPr/>
           <p:nvPr/>
         </p:nvSpPr>
         <p:spPr>
           <a:xfrm>
-            <a:off x="685800" y="685800"/>
-            <a:ext cx="7772400" cy="1143000"/>
-          </a:xfrm>
-          <a:prstGeom prst="rect">
-            <a:avLst/>
-          </a:prstGeom>
+            <a:off x="640080" y="1051560"/>
+            <a:ext cx="548640" cy="118872"/>
+          </a:xfrm>
+          <a:prstGeom prst="rect">
+            <a:avLst/>
+          </a:prstGeom>
+          <a:solidFill>
+            <a:srgbClr val="E25C4B"/>
+          </a:solidFill>
+          <a:ln>
+            <a:noFill/>
+          </a:ln>
         </p:spPr>
         <p:txBody>
           <a:bodyPr/>
-          <a:p>
-            <a:r>
-              <a:rPr lang="en-US" sz="3600" b="1"/>
+          <a:lstStyle/>
+          <a:p/>
+        </p:txBody>
+      </p:sp>
+      <p:sp>
+        <p:nvSpPr>
+          <p:cNvPr id="3" name="Txt"/>
+          <p:cNvSpPr txBox="1"/>
+          <p:nvPr/>
+        </p:nvSpPr>
+        <p:spPr>
+          <a:xfrm>
+            <a:off x="640080" y="1371600"/>
+            <a:ext cx="7863840" cy="1554480"/>
+          </a:xfrm>
+          <a:prstGeom prst="rect">
+            <a:avLst/>
+          </a:prstGeom>
+        </p:spPr>
+        <p:txBody>
+          <a:bodyPr wrap="square" anchor="t">
+            <a:normAutofit/>
+          </a:bodyPr>
+          <a:lstStyle/>
+          <a:p>
+            <a:pPr algn="l">
+              <a:spcAft>
+                <a:spcPts val="600"/>
+              </a:spcAft>
+              <a:buNone/>
+            </a:pPr>
+            <a:r>
+              <a:rPr lang="en-US" sz="6600" b="1">
+                <a:solidFill>
+                  <a:srgbClr val="1A1A1A"/>
+                </a:solidFill>
+              </a:rPr>
               <a:t>Blok</a:t>
             </a:r>
           </a:p>
@@ -88,25 +132,76 @@
       </p:sp>
       <p:sp>
         <p:nvSpPr>
-          <p:cNvPr id="3" name="Body"/>
-          <p:cNvSpPr/>
-          <p:nvPr/>
-        </p:nvSpPr>
-        <p:spPr>
-          <a:xfrm>
-            <a:off x="685800" y="2057400"/>
-            <a:ext cx="7772400" cy="3886200"/>
-          </a:xfrm>
-          <a:prstGeom prst="rect">
-            <a:avLst/>
-          </a:prstGeom>
-        </p:spPr>
-        <p:txBody>
-          <a:bodyPr/>
-          <a:p>
-            <a:r>
-              <a:rPr lang="en-US" sz="2000"/>
+          <p:cNvPr id="4" name="Txt"/>
+          <p:cNvSpPr txBox="1"/>
+          <p:nvPr/>
+        </p:nvSpPr>
+        <p:spPr>
+          <a:xfrm>
+            <a:off x="640080" y="2834640"/>
+            <a:ext cx="7863840" cy="822960"/>
+          </a:xfrm>
+          <a:prstGeom prst="rect">
+            <a:avLst/>
+          </a:prstGeom>
+        </p:spPr>
+        <p:txBody>
+          <a:bodyPr wrap="square" anchor="t">
+            <a:normAutofit/>
+          </a:bodyPr>
+          <a:lstStyle/>
+          <a:p>
+            <a:pPr algn="l">
+              <a:spcAft>
+                <a:spcPts val="600"/>
+              </a:spcAft>
+              <a:buNone/>
+            </a:pPr>
+            <a:r>
+              <a:rPr lang="en-US" sz="2600">
+                <a:solidFill>
+                  <a:srgbClr val="6B6B6B"/>
+                </a:solidFill>
+              </a:rPr>
               <a:t>The block-based editor for modern documents</a:t>
+            </a:r>
+          </a:p>
+        </p:txBody>
+      </p:sp>
+      <p:sp>
+        <p:nvSpPr>
+          <p:cNvPr id="5" name="Txt"/>
+          <p:cNvSpPr txBox="1"/>
+          <p:nvPr/>
+        </p:nvSpPr>
+        <p:spPr>
+          <a:xfrm>
+            <a:off x="640080" y="5806440"/>
+            <a:ext cx="7863840" cy="457200"/>
+          </a:xfrm>
+          <a:prstGeom prst="rect">
+            <a:avLst/>
+          </a:prstGeom>
+        </p:spPr>
+        <p:txBody>
+          <a:bodyPr wrap="square" anchor="t">
+            <a:normAutofit/>
+          </a:bodyPr>
+          <a:lstStyle/>
+          <a:p>
+            <a:pPr algn="l">
+              <a:spcAft>
+                <a:spcPts val="600"/>
+              </a:spcAft>
+              <a:buNone/>
+            </a:pPr>
+            <a:r>
+              <a:rPr lang="en-US" sz="1300" b="1" spc="300">
+                <a:solidFill>
+                  <a:srgbClr val="E25C4B"/>
+                </a:solidFill>
+              </a:rPr>
+              <a:t>PRODUCT OVERVIEW · 2026</a:t>
             </a:r>
           </a:p>
         </p:txBody>
@@ -131,62 +226,114 @@
       <p:grpSpPr/>
       <p:sp>
         <p:nvSpPr>
-          <p:cNvPr id="2" name="Title"/>
-          <p:cNvSpPr/>
-          <p:nvPr/>
-        </p:nvSpPr>
-        <p:spPr>
-          <a:xfrm>
-            <a:off x="685800" y="685800"/>
-            <a:ext cx="7772400" cy="1143000"/>
-          </a:xfrm>
-          <a:prstGeom prst="rect">
-            <a:avLst/>
-          </a:prstGeom>
-        </p:spPr>
-        <p:txBody>
-          <a:bodyPr/>
-          <a:p>
-            <a:r>
-              <a:rPr lang="en-US" sz="3600" b="1"/>
-              <a:t>Why Blok</a:t>
-            </a:r>
-          </a:p>
-        </p:txBody>
-      </p:sp>
-      <p:sp>
-        <p:nvSpPr>
-          <p:cNvPr id="3" name="Body"/>
-          <p:cNvSpPr/>
-          <p:nvPr/>
-        </p:nvSpPr>
-        <p:spPr>
-          <a:xfrm>
-            <a:off x="685800" y="2057400"/>
-            <a:ext cx="7772400" cy="3886200"/>
-          </a:xfrm>
-          <a:prstGeom prst="rect">
-            <a:avLst/>
-          </a:prstGeom>
-        </p:spPr>
-        <p:txBody>
-          <a:bodyPr/>
-          <a:p>
-            <a:r>
-              <a:rPr lang="en-US" sz="2000"/>
-              <a:t>Everything is a block</a:t>
-            </a:r>
-          </a:p>
-          <a:p>
-            <a:r>
-              <a:rPr lang="en-US" sz="2000"/>
-              <a:t>Headless and framework-agnostic</a:t>
-            </a:r>
-          </a:p>
-          <a:p>
-            <a:r>
-              <a:rPr lang="en-US" sz="2000"/>
-              <a:t>Clean JSON output</a:t>
+          <p:cNvPr id="6" name="Txt"/>
+          <p:cNvSpPr txBox="1"/>
+          <p:nvPr/>
+        </p:nvSpPr>
+        <p:spPr>
+          <a:xfrm>
+            <a:off x="640080" y="914400"/>
+            <a:ext cx="7863840" cy="457200"/>
+          </a:xfrm>
+          <a:prstGeom prst="rect">
+            <a:avLst/>
+          </a:prstGeom>
+        </p:spPr>
+        <p:txBody>
+          <a:bodyPr wrap="square" anchor="t">
+            <a:normAutofit/>
+          </a:bodyPr>
+          <a:lstStyle/>
+          <a:p>
+            <a:pPr algn="l">
+              <a:spcAft>
+                <a:spcPts val="600"/>
+              </a:spcAft>
+              <a:buNone/>
+            </a:pPr>
+            <a:r>
+              <a:rPr lang="en-US" sz="1300" b="1" spc="300">
+                <a:solidFill>
+                  <a:srgbClr val="E25C4B"/>
+                </a:solidFill>
+              </a:rPr>
+              <a:t>THE PROBLEM</a:t>
+            </a:r>
+          </a:p>
+        </p:txBody>
+      </p:sp>
+      <p:sp>
+        <p:nvSpPr>
+          <p:cNvPr id="7" name="Txt"/>
+          <p:cNvSpPr txBox="1"/>
+          <p:nvPr/>
+        </p:nvSpPr>
+        <p:spPr>
+          <a:xfrm>
+            <a:off x="640080" y="1371600"/>
+            <a:ext cx="7863840" cy="1737360"/>
+          </a:xfrm>
+          <a:prstGeom prst="rect">
+            <a:avLst/>
+          </a:prstGeom>
+        </p:spPr>
+        <p:txBody>
+          <a:bodyPr wrap="square" anchor="t">
+            <a:normAutofit/>
+          </a:bodyPr>
+          <a:lstStyle/>
+          <a:p>
+            <a:pPr algn="l">
+              <a:spcAft>
+                <a:spcPts val="600"/>
+              </a:spcAft>
+              <a:buNone/>
+            </a:pPr>
+            <a:r>
+              <a:rPr lang="en-US" sz="4000" b="1">
+                <a:solidFill>
+                  <a:srgbClr val="1A1A1A"/>
+                </a:solidFill>
+              </a:rPr>
+              <a:t>Rich text shouldn’t trap your content</a:t>
+            </a:r>
+          </a:p>
+        </p:txBody>
+      </p:sp>
+      <p:sp>
+        <p:nvSpPr>
+          <p:cNvPr id="8" name="Txt"/>
+          <p:cNvSpPr txBox="1"/>
+          <p:nvPr/>
+        </p:nvSpPr>
+        <p:spPr>
+          <a:xfrm>
+            <a:off x="640080" y="3200400"/>
+            <a:ext cx="7040880" cy="1645920"/>
+          </a:xfrm>
+          <a:prstGeom prst="rect">
+            <a:avLst/>
+          </a:prstGeom>
+        </p:spPr>
+        <p:txBody>
+          <a:bodyPr wrap="square" anchor="t">
+            <a:normAutofit/>
+          </a:bodyPr>
+          <a:lstStyle/>
+          <a:p>
+            <a:pPr algn="l">
+              <a:spcAft>
+                <a:spcPts val="600"/>
+              </a:spcAft>
+              <a:buNone/>
+            </a:pPr>
+            <a:r>
+              <a:rPr lang="en-US" sz="2200">
+                <a:solidFill>
+                  <a:srgbClr val="6B6B6B"/>
+                </a:solidFill>
+              </a:rPr>
+              <a:t>Most editors serialize to tangled HTML. Move that content somewhere new and the structure — and half the formatting — breaks on the way out.</a:t>
             </a:r>
           </a:p>
         </p:txBody>
@@ -211,62 +358,974 @@
       <p:grpSpPr/>
       <p:sp>
         <p:nvSpPr>
-          <p:cNvPr id="2" name="Title"/>
+          <p:cNvPr id="9" name="Txt"/>
+          <p:cNvSpPr txBox="1"/>
+          <p:nvPr/>
+        </p:nvSpPr>
+        <p:spPr>
+          <a:xfrm>
+            <a:off x="640080" y="914400"/>
+            <a:ext cx="7863840" cy="457200"/>
+          </a:xfrm>
+          <a:prstGeom prst="rect">
+            <a:avLst/>
+          </a:prstGeom>
+        </p:spPr>
+        <p:txBody>
+          <a:bodyPr wrap="square" anchor="t">
+            <a:normAutofit/>
+          </a:bodyPr>
+          <a:lstStyle/>
+          <a:p>
+            <a:pPr algn="l">
+              <a:spcAft>
+                <a:spcPts val="600"/>
+              </a:spcAft>
+              <a:buNone/>
+            </a:pPr>
+            <a:r>
+              <a:rPr lang="en-US" sz="1300" b="1" spc="300">
+                <a:solidFill>
+                  <a:srgbClr val="E25C4B"/>
+                </a:solidFill>
+              </a:rPr>
+              <a:t>THE IDEA</a:t>
+            </a:r>
+          </a:p>
+        </p:txBody>
+      </p:sp>
+      <p:sp>
+        <p:nvSpPr>
+          <p:cNvPr id="10" name="Txt"/>
+          <p:cNvSpPr txBox="1"/>
+          <p:nvPr/>
+        </p:nvSpPr>
+        <p:spPr>
+          <a:xfrm>
+            <a:off x="640080" y="1371600"/>
+            <a:ext cx="7863840" cy="1737360"/>
+          </a:xfrm>
+          <a:prstGeom prst="rect">
+            <a:avLst/>
+          </a:prstGeom>
+        </p:spPr>
+        <p:txBody>
+          <a:bodyPr wrap="square" anchor="t">
+            <a:normAutofit/>
+          </a:bodyPr>
+          <a:lstStyle/>
+          <a:p>
+            <a:pPr algn="l">
+              <a:spcAft>
+                <a:spcPts val="600"/>
+              </a:spcAft>
+              <a:buNone/>
+            </a:pPr>
+            <a:r>
+              <a:rPr lang="en-US" sz="4400" b="1">
+                <a:solidFill>
+                  <a:srgbClr val="1A1A1A"/>
+                </a:solidFill>
+              </a:rPr>
+              <a:t>Everything is a block</a:t>
+            </a:r>
+          </a:p>
+        </p:txBody>
+      </p:sp>
+      <p:sp>
+        <p:nvSpPr>
+          <p:cNvPr id="11" name="Txt"/>
+          <p:cNvSpPr txBox="1"/>
+          <p:nvPr/>
+        </p:nvSpPr>
+        <p:spPr>
+          <a:xfrm>
+            <a:off x="640080" y="3017520"/>
+            <a:ext cx="7863840" cy="3291840"/>
+          </a:xfrm>
+          <a:prstGeom prst="rect">
+            <a:avLst/>
+          </a:prstGeom>
+        </p:spPr>
+        <p:txBody>
+          <a:bodyPr wrap="square" anchor="t">
+            <a:normAutofit/>
+          </a:bodyPr>
+          <a:lstStyle/>
+          <a:p>
+            <a:pPr marL="342900" indent="-342900" algn="l">
+              <a:spcAft>
+                <a:spcPts val="900"/>
+              </a:spcAft>
+              <a:buClr>
+                <a:srgbClr val="E25C4B"/>
+              </a:buClr>
+              <a:buFont typeface="Arial"/>
+              <a:buChar char="•"/>
+            </a:pPr>
+            <a:r>
+              <a:rPr lang="en-US" sz="2200">
+                <a:solidFill>
+                  <a:srgbClr val="1A1A1A"/>
+                </a:solidFill>
+              </a:rPr>
+              <a:t>A paragraph is a block</a:t>
+            </a:r>
+          </a:p>
+          <a:p>
+            <a:pPr marL="342900" indent="-342900" algn="l">
+              <a:spcAft>
+                <a:spcPts val="900"/>
+              </a:spcAft>
+              <a:buClr>
+                <a:srgbClr val="E25C4B"/>
+              </a:buClr>
+              <a:buFont typeface="Arial"/>
+              <a:buChar char="•"/>
+            </a:pPr>
+            <a:r>
+              <a:rPr lang="en-US" sz="2200">
+                <a:solidFill>
+                  <a:srgbClr val="1A1A1A"/>
+                </a:solidFill>
+              </a:rPr>
+              <a:t>A table is a block</a:t>
+            </a:r>
+          </a:p>
+          <a:p>
+            <a:pPr marL="342900" indent="-342900" algn="l">
+              <a:spcAft>
+                <a:spcPts val="900"/>
+              </a:spcAft>
+              <a:buClr>
+                <a:srgbClr val="E25C4B"/>
+              </a:buClr>
+              <a:buFont typeface="Arial"/>
+              <a:buChar char="•"/>
+            </a:pPr>
+            <a:r>
+              <a:rPr lang="en-US" sz="2200">
+                <a:solidFill>
+                  <a:srgbClr val="1A1A1A"/>
+                </a:solidFill>
+              </a:rPr>
+              <a:t>A database row is a block</a:t>
+            </a:r>
+          </a:p>
+          <a:p>
+            <a:pPr marL="342900" indent="-342900" algn="l">
+              <a:spcAft>
+                <a:spcPts val="900"/>
+              </a:spcAft>
+              <a:buClr>
+                <a:srgbClr val="E25C4B"/>
+              </a:buClr>
+              <a:buFont typeface="Arial"/>
+              <a:buChar char="•"/>
+            </a:pPr>
+            <a:r>
+              <a:rPr lang="en-US" sz="2200">
+                <a:solidFill>
+                  <a:srgbClr val="1A1A1A"/>
+                </a:solidFill>
+              </a:rPr>
+              <a:t>A page is just a block with children</a:t>
+            </a:r>
+          </a:p>
+        </p:txBody>
+      </p:sp>
+    </p:spTree>
+  </p:cSld>
+  <p:clrMapOvr>
+    <a:overrideClrMapping/>
+  </p:clrMapOvr>
+</p:sld>
+</file>
+
+<file path=ppt/slides/slide4.xml><?xml version="1.0" encoding="utf-8"?>
+<p:sld xmlns:p="http://schemas.openxmlformats.org/presentationml/2006/main" xmlns:a="http://schemas.openxmlformats.org/drawingml/2006/main" xmlns:r="http://schemas.openxmlformats.org/officeDocument/2006/relationships">
+  <p:cSld>
+    <p:spTree>
+      <p:nvGrpSpPr>
+        <p:cNvPr id="1" name=""/>
+        <p:cNvGrpSpPr/>
+        <p:nvPr/>
+      </p:nvGrpSpPr>
+      <p:grpSpPr/>
+      <p:sp>
+        <p:nvSpPr>
+          <p:cNvPr id="12" name="Txt"/>
+          <p:cNvSpPr txBox="1"/>
+          <p:nvPr/>
+        </p:nvSpPr>
+        <p:spPr>
+          <a:xfrm>
+            <a:off x="640080" y="914400"/>
+            <a:ext cx="7863840" cy="457200"/>
+          </a:xfrm>
+          <a:prstGeom prst="rect">
+            <a:avLst/>
+          </a:prstGeom>
+        </p:spPr>
+        <p:txBody>
+          <a:bodyPr wrap="square" anchor="t">
+            <a:normAutofit/>
+          </a:bodyPr>
+          <a:lstStyle/>
+          <a:p>
+            <a:pPr algn="l">
+              <a:spcAft>
+                <a:spcPts val="600"/>
+              </a:spcAft>
+              <a:buNone/>
+            </a:pPr>
+            <a:r>
+              <a:rPr lang="en-US" sz="1300" b="1" spc="300">
+                <a:solidFill>
+                  <a:srgbClr val="E25C4B"/>
+                </a:solidFill>
+              </a:rPr>
+              <a:t>WHY TEAMS CHOOSE BLOK</a:t>
+            </a:r>
+          </a:p>
+        </p:txBody>
+      </p:sp>
+      <p:sp>
+        <p:nvSpPr>
+          <p:cNvPr id="13" name="Txt"/>
+          <p:cNvSpPr txBox="1"/>
+          <p:nvPr/>
+        </p:nvSpPr>
+        <p:spPr>
+          <a:xfrm>
+            <a:off x="640080" y="1371600"/>
+            <a:ext cx="7863840" cy="1737360"/>
+          </a:xfrm>
+          <a:prstGeom prst="rect">
+            <a:avLst/>
+          </a:prstGeom>
+        </p:spPr>
+        <p:txBody>
+          <a:bodyPr wrap="square" anchor="t">
+            <a:normAutofit/>
+          </a:bodyPr>
+          <a:lstStyle/>
+          <a:p>
+            <a:pPr algn="l">
+              <a:spcAft>
+                <a:spcPts val="600"/>
+              </a:spcAft>
+              <a:buNone/>
+            </a:pPr>
+            <a:r>
+              <a:rPr lang="en-US" sz="4000" b="1">
+                <a:solidFill>
+                  <a:srgbClr val="1A1A1A"/>
+                </a:solidFill>
+              </a:rPr>
+              <a:t>Built for developers</a:t>
+            </a:r>
+          </a:p>
+        </p:txBody>
+      </p:sp>
+      <p:sp>
+        <p:nvSpPr>
+          <p:cNvPr id="14" name="Txt"/>
+          <p:cNvSpPr txBox="1"/>
+          <p:nvPr/>
+        </p:nvSpPr>
+        <p:spPr>
+          <a:xfrm>
+            <a:off x="640080" y="3017520"/>
+            <a:ext cx="7863840" cy="3291840"/>
+          </a:xfrm>
+          <a:prstGeom prst="rect">
+            <a:avLst/>
+          </a:prstGeom>
+        </p:spPr>
+        <p:txBody>
+          <a:bodyPr wrap="square" anchor="t">
+            <a:normAutofit/>
+          </a:bodyPr>
+          <a:lstStyle/>
+          <a:p>
+            <a:pPr marL="342900" indent="-342900" algn="l">
+              <a:spcAft>
+                <a:spcPts val="900"/>
+              </a:spcAft>
+              <a:buClr>
+                <a:srgbClr val="E25C4B"/>
+              </a:buClr>
+              <a:buFont typeface="Arial"/>
+              <a:buChar char="•"/>
+            </a:pPr>
+            <a:r>
+              <a:rPr lang="en-US" sz="2200">
+                <a:solidFill>
+                  <a:srgbClr val="1A1A1A"/>
+                </a:solidFill>
+              </a:rPr>
+              <a:t>Headless and framework-agnostic</a:t>
+            </a:r>
+          </a:p>
+          <a:p>
+            <a:pPr marL="342900" indent="-342900" algn="l">
+              <a:spcAft>
+                <a:spcPts val="900"/>
+              </a:spcAft>
+              <a:buClr>
+                <a:srgbClr val="E25C4B"/>
+              </a:buClr>
+              <a:buFont typeface="Arial"/>
+              <a:buChar char="•"/>
+            </a:pPr>
+            <a:r>
+              <a:rPr lang="en-US" sz="2200">
+                <a:solidFill>
+                  <a:srgbClr val="1A1A1A"/>
+                </a:solidFill>
+              </a:rPr>
+              <a:t>Clean, structured JSON — never HTML soup</a:t>
+            </a:r>
+          </a:p>
+          <a:p>
+            <a:pPr marL="342900" indent="-342900" algn="l">
+              <a:spcAft>
+                <a:spcPts val="900"/>
+              </a:spcAft>
+              <a:buClr>
+                <a:srgbClr val="E25C4B"/>
+              </a:buClr>
+              <a:buFont typeface="Arial"/>
+              <a:buChar char="•"/>
+            </a:pPr>
+            <a:r>
+              <a:rPr lang="en-US" sz="2200">
+                <a:solidFill>
+                  <a:srgbClr val="1A1A1A"/>
+                </a:solidFill>
+              </a:rPr>
+              <a:t>Typed plugin API for custom tools</a:t>
+            </a:r>
+          </a:p>
+          <a:p>
+            <a:pPr marL="342900" indent="-342900" algn="l">
+              <a:spcAft>
+                <a:spcPts val="900"/>
+              </a:spcAft>
+              <a:buClr>
+                <a:srgbClr val="E25C4B"/>
+              </a:buClr>
+              <a:buFont typeface="Arial"/>
+              <a:buChar char="•"/>
+            </a:pPr>
+            <a:r>
+              <a:rPr lang="en-US" sz="2200">
+                <a:solidFill>
+                  <a:srgbClr val="1A1A1A"/>
+                </a:solidFill>
+              </a:rPr>
+              <a:t>Real-time collaboration powered by Yjs</a:t>
+            </a:r>
+          </a:p>
+        </p:txBody>
+      </p:sp>
+    </p:spTree>
+  </p:cSld>
+  <p:clrMapOvr>
+    <a:overrideClrMapping/>
+  </p:clrMapOvr>
+</p:sld>
+</file>
+
+<file path=ppt/slides/slide5.xml><?xml version="1.0" encoding="utf-8"?>
+<p:sld xmlns:p="http://schemas.openxmlformats.org/presentationml/2006/main" xmlns:a="http://schemas.openxmlformats.org/drawingml/2006/main" xmlns:r="http://schemas.openxmlformats.org/officeDocument/2006/relationships">
+  <p:cSld>
+    <p:spTree>
+      <p:nvGrpSpPr>
+        <p:cNvPr id="1" name=""/>
+        <p:cNvGrpSpPr/>
+        <p:nvPr/>
+      </p:nvGrpSpPr>
+      <p:grpSpPr/>
+      <p:sp>
+        <p:nvSpPr>
+          <p:cNvPr id="15" name="Txt"/>
+          <p:cNvSpPr txBox="1"/>
+          <p:nvPr/>
+        </p:nvSpPr>
+        <p:spPr>
+          <a:xfrm>
+            <a:off x="640080" y="914400"/>
+            <a:ext cx="7863840" cy="457200"/>
+          </a:xfrm>
+          <a:prstGeom prst="rect">
+            <a:avLst/>
+          </a:prstGeom>
+        </p:spPr>
+        <p:txBody>
+          <a:bodyPr wrap="square" anchor="t">
+            <a:normAutofit/>
+          </a:bodyPr>
+          <a:lstStyle/>
+          <a:p>
+            <a:pPr algn="l">
+              <a:spcAft>
+                <a:spcPts val="600"/>
+              </a:spcAft>
+              <a:buNone/>
+            </a:pPr>
+            <a:r>
+              <a:rPr lang="en-US" sz="1300" b="1" spc="300">
+                <a:solidFill>
+                  <a:srgbClr val="E25C4B"/>
+                </a:solidFill>
+              </a:rPr>
+              <a:t>BY THE NUMBERS</a:t>
+            </a:r>
+          </a:p>
+        </p:txBody>
+      </p:sp>
+      <p:sp>
+        <p:nvSpPr>
+          <p:cNvPr id="16" name="Txt"/>
+          <p:cNvSpPr txBox="1"/>
+          <p:nvPr/>
+        </p:nvSpPr>
+        <p:spPr>
+          <a:xfrm>
+            <a:off x="640080" y="1371600"/>
+            <a:ext cx="7863840" cy="1737360"/>
+          </a:xfrm>
+          <a:prstGeom prst="rect">
+            <a:avLst/>
+          </a:prstGeom>
+        </p:spPr>
+        <p:txBody>
+          <a:bodyPr wrap="square" anchor="t">
+            <a:normAutofit/>
+          </a:bodyPr>
+          <a:lstStyle/>
+          <a:p>
+            <a:pPr algn="l">
+              <a:spcAft>
+                <a:spcPts val="600"/>
+              </a:spcAft>
+              <a:buNone/>
+            </a:pPr>
+            <a:r>
+              <a:rPr lang="en-US" sz="4000" b="1">
+                <a:solidFill>
+                  <a:srgbClr val="1A1A1A"/>
+                </a:solidFill>
+              </a:rPr>
+              <a:t>Small core, serious range</a:t>
+            </a:r>
+          </a:p>
+        </p:txBody>
+      </p:sp>
+      <p:sp>
+        <p:nvSpPr>
+          <p:cNvPr id="17" name="Txt"/>
+          <p:cNvSpPr txBox="1"/>
+          <p:nvPr/>
+        </p:nvSpPr>
+        <p:spPr>
+          <a:xfrm>
+            <a:off x="640080" y="2834640"/>
+            <a:ext cx="2468880" cy="2011680"/>
+          </a:xfrm>
+          <a:prstGeom prst="rect">
+            <a:avLst/>
+          </a:prstGeom>
+        </p:spPr>
+        <p:txBody>
+          <a:bodyPr wrap="square" anchor="t">
+            <a:normAutofit/>
+          </a:bodyPr>
+          <a:lstStyle/>
+          <a:p>
+            <a:pPr algn="l">
+              <a:spcAft>
+                <a:spcPts val="300"/>
+              </a:spcAft>
+              <a:buNone/>
+            </a:pPr>
+            <a:r>
+              <a:rPr lang="en-US" sz="5400" b="1">
+                <a:solidFill>
+                  <a:srgbClr val="E25C4B"/>
+                </a:solidFill>
+              </a:rPr>
+              <a:t>15+</a:t>
+            </a:r>
+          </a:p>
+          <a:p>
+            <a:pPr algn="l">
+              <a:spcAft>
+                <a:spcPts val="600"/>
+              </a:spcAft>
+              <a:buNone/>
+            </a:pPr>
+            <a:r>
+              <a:rPr lang="en-US" sz="1500">
+                <a:solidFill>
+                  <a:srgbClr val="6B6B6B"/>
+                </a:solidFill>
+              </a:rPr>
+              <a:t>block types out of the box</a:t>
+            </a:r>
+          </a:p>
+        </p:txBody>
+      </p:sp>
+      <p:sp>
+        <p:nvSpPr>
+          <p:cNvPr id="18" name="Txt"/>
+          <p:cNvSpPr txBox="1"/>
+          <p:nvPr/>
+        </p:nvSpPr>
+        <p:spPr>
+          <a:xfrm>
+            <a:off x="3337560" y="2834640"/>
+            <a:ext cx="2468880" cy="2011680"/>
+          </a:xfrm>
+          <a:prstGeom prst="rect">
+            <a:avLst/>
+          </a:prstGeom>
+        </p:spPr>
+        <p:txBody>
+          <a:bodyPr wrap="square" anchor="t">
+            <a:normAutofit/>
+          </a:bodyPr>
+          <a:lstStyle/>
+          <a:p>
+            <a:pPr algn="l">
+              <a:spcAft>
+                <a:spcPts val="300"/>
+              </a:spcAft>
+              <a:buNone/>
+            </a:pPr>
+            <a:r>
+              <a:rPr lang="en-US" sz="5400" b="1">
+                <a:solidFill>
+                  <a:srgbClr val="E25C4B"/>
+                </a:solidFill>
+              </a:rPr>
+              <a:t>100%</a:t>
+            </a:r>
+          </a:p>
+          <a:p>
+            <a:pPr algn="l">
+              <a:spcAft>
+                <a:spcPts val="600"/>
+              </a:spcAft>
+              <a:buNone/>
+            </a:pPr>
+            <a:r>
+              <a:rPr lang="en-US" sz="1500">
+                <a:solidFill>
+                  <a:srgbClr val="6B6B6B"/>
+                </a:solidFill>
+              </a:rPr>
+              <a:t>portable JSON, zero HTML</a:t>
+            </a:r>
+          </a:p>
+        </p:txBody>
+      </p:sp>
+      <p:sp>
+        <p:nvSpPr>
+          <p:cNvPr id="19" name="Txt"/>
+          <p:cNvSpPr txBox="1"/>
+          <p:nvPr/>
+        </p:nvSpPr>
+        <p:spPr>
+          <a:xfrm>
+            <a:off x="6035040" y="2834640"/>
+            <a:ext cx="2468880" cy="2011680"/>
+          </a:xfrm>
+          <a:prstGeom prst="rect">
+            <a:avLst/>
+          </a:prstGeom>
+        </p:spPr>
+        <p:txBody>
+          <a:bodyPr wrap="square" anchor="t">
+            <a:normAutofit/>
+          </a:bodyPr>
+          <a:lstStyle/>
+          <a:p>
+            <a:pPr algn="l">
+              <a:spcAft>
+                <a:spcPts val="300"/>
+              </a:spcAft>
+              <a:buNone/>
+            </a:pPr>
+            <a:r>
+              <a:rPr lang="en-US" sz="5400" b="1">
+                <a:solidFill>
+                  <a:srgbClr val="E25C4B"/>
+                </a:solidFill>
+              </a:rPr>
+              <a:t>0</a:t>
+            </a:r>
+          </a:p>
+          <a:p>
+            <a:pPr algn="l">
+              <a:spcAft>
+                <a:spcPts val="600"/>
+              </a:spcAft>
+              <a:buNone/>
+            </a:pPr>
+            <a:r>
+              <a:rPr lang="en-US" sz="1500">
+                <a:solidFill>
+                  <a:srgbClr val="6B6B6B"/>
+                </a:solidFill>
+              </a:rPr>
+              <a:t>frameworks you’re locked into</a:t>
+            </a:r>
+          </a:p>
+        </p:txBody>
+      </p:sp>
+    </p:spTree>
+  </p:cSld>
+  <p:clrMapOvr>
+    <a:overrideClrMapping/>
+  </p:clrMapOvr>
+</p:sld>
+</file>
+
+<file path=ppt/slides/slide6.xml><?xml version="1.0" encoding="utf-8"?>
+<p:sld xmlns:p="http://schemas.openxmlformats.org/presentationml/2006/main" xmlns:a="http://schemas.openxmlformats.org/drawingml/2006/main" xmlns:r="http://schemas.openxmlformats.org/officeDocument/2006/relationships">
+  <p:cSld>
+    <p:spTree>
+      <p:nvGrpSpPr>
+        <p:cNvPr id="1" name=""/>
+        <p:cNvGrpSpPr/>
+        <p:nvPr/>
+      </p:nvGrpSpPr>
+      <p:grpSpPr/>
+      <p:sp>
+        <p:nvSpPr>
+          <p:cNvPr id="20" name="Txt"/>
+          <p:cNvSpPr txBox="1"/>
+          <p:nvPr/>
+        </p:nvSpPr>
+        <p:spPr>
+          <a:xfrm>
+            <a:off x="640080" y="914400"/>
+            <a:ext cx="7863840" cy="457200"/>
+          </a:xfrm>
+          <a:prstGeom prst="rect">
+            <a:avLst/>
+          </a:prstGeom>
+        </p:spPr>
+        <p:txBody>
+          <a:bodyPr wrap="square" anchor="t">
+            <a:normAutofit/>
+          </a:bodyPr>
+          <a:lstStyle/>
+          <a:p>
+            <a:pPr algn="l">
+              <a:spcAft>
+                <a:spcPts val="600"/>
+              </a:spcAft>
+              <a:buNone/>
+            </a:pPr>
+            <a:r>
+              <a:rPr lang="en-US" sz="1300" b="1" spc="300">
+                <a:solidFill>
+                  <a:srgbClr val="E25C4B"/>
+                </a:solidFill>
+              </a:rPr>
+              <a:t>WHAT’S NEXT</a:t>
+            </a:r>
+          </a:p>
+        </p:txBody>
+      </p:sp>
+      <p:sp>
+        <p:nvSpPr>
+          <p:cNvPr id="21" name="Txt"/>
+          <p:cNvSpPr txBox="1"/>
+          <p:nvPr/>
+        </p:nvSpPr>
+        <p:spPr>
+          <a:xfrm>
+            <a:off x="640080" y="1371600"/>
+            <a:ext cx="7863840" cy="1737360"/>
+          </a:xfrm>
+          <a:prstGeom prst="rect">
+            <a:avLst/>
+          </a:prstGeom>
+        </p:spPr>
+        <p:txBody>
+          <a:bodyPr wrap="square" anchor="t">
+            <a:normAutofit/>
+          </a:bodyPr>
+          <a:lstStyle/>
+          <a:p>
+            <a:pPr algn="l">
+              <a:spcAft>
+                <a:spcPts val="600"/>
+              </a:spcAft>
+              <a:buNone/>
+            </a:pPr>
+            <a:r>
+              <a:rPr lang="en-US" sz="4000" b="1">
+                <a:solidFill>
+                  <a:srgbClr val="1A1A1A"/>
+                </a:solidFill>
+              </a:rPr>
+              <a:t>Roadmap</a:t>
+            </a:r>
+          </a:p>
+        </p:txBody>
+      </p:sp>
+      <p:sp>
+        <p:nvSpPr>
+          <p:cNvPr id="22" name="Txt"/>
+          <p:cNvSpPr txBox="1"/>
+          <p:nvPr/>
+        </p:nvSpPr>
+        <p:spPr>
+          <a:xfrm>
+            <a:off x="640080" y="3017520"/>
+            <a:ext cx="7863840" cy="3291840"/>
+          </a:xfrm>
+          <a:prstGeom prst="rect">
+            <a:avLst/>
+          </a:prstGeom>
+        </p:spPr>
+        <p:txBody>
+          <a:bodyPr wrap="square" anchor="t">
+            <a:normAutofit/>
+          </a:bodyPr>
+          <a:lstStyle/>
+          <a:p>
+            <a:pPr marL="342900" indent="-342900" algn="l">
+              <a:spcAft>
+                <a:spcPts val="900"/>
+              </a:spcAft>
+              <a:buClr>
+                <a:srgbClr val="E25C4B"/>
+              </a:buClr>
+              <a:buFont typeface="Arial"/>
+              <a:buChar char="•"/>
+            </a:pPr>
+            <a:r>
+              <a:rPr lang="en-US" sz="2200">
+                <a:solidFill>
+                  <a:srgbClr val="1A1A1A"/>
+                </a:solidFill>
+              </a:rPr>
+              <a:t>Inline office previews</a:t>
+            </a:r>
+          </a:p>
+          <a:p>
+            <a:pPr marL="342900" indent="-342900" algn="l">
+              <a:spcAft>
+                <a:spcPts val="900"/>
+              </a:spcAft>
+              <a:buClr>
+                <a:srgbClr val="E25C4B"/>
+              </a:buClr>
+              <a:buFont typeface="Arial"/>
+              <a:buChar char="•"/>
+            </a:pPr>
+            <a:r>
+              <a:rPr lang="en-US" sz="2200">
+                <a:solidFill>
+                  <a:srgbClr val="1A1A1A"/>
+                </a:solidFill>
+              </a:rPr>
+              <a:t>Database &amp; kanban views</a:t>
+            </a:r>
+          </a:p>
+          <a:p>
+            <a:pPr marL="342900" indent="-342900" algn="l">
+              <a:spcAft>
+                <a:spcPts val="900"/>
+              </a:spcAft>
+              <a:buClr>
+                <a:srgbClr val="E25C4B"/>
+              </a:buClr>
+              <a:buFont typeface="Arial"/>
+              <a:buChar char="•"/>
+            </a:pPr>
+            <a:r>
+              <a:rPr lang="en-US" sz="2200">
+                <a:solidFill>
+                  <a:srgbClr val="1A1A1A"/>
+                </a:solidFill>
+              </a:rPr>
+              <a:t>Comments &amp; suggestions</a:t>
+            </a:r>
+          </a:p>
+          <a:p>
+            <a:pPr marL="342900" indent="-342900" algn="l">
+              <a:spcAft>
+                <a:spcPts val="900"/>
+              </a:spcAft>
+              <a:buClr>
+                <a:srgbClr val="E25C4B"/>
+              </a:buClr>
+              <a:buFont typeface="Arial"/>
+              <a:buChar char="•"/>
+            </a:pPr>
+            <a:r>
+              <a:rPr lang="en-US" sz="2200">
+                <a:solidFill>
+                  <a:srgbClr val="1A1A1A"/>
+                </a:solidFill>
+              </a:rPr>
+              <a:t>AI-assisted authoring</a:t>
+            </a:r>
+          </a:p>
+        </p:txBody>
+      </p:sp>
+    </p:spTree>
+  </p:cSld>
+  <p:clrMapOvr>
+    <a:overrideClrMapping/>
+  </p:clrMapOvr>
+</p:sld>
+</file>
+
+<file path=ppt/slides/slide7.xml><?xml version="1.0" encoding="utf-8"?>
+<p:sld xmlns:p="http://schemas.openxmlformats.org/presentationml/2006/main" xmlns:a="http://schemas.openxmlformats.org/drawingml/2006/main" xmlns:r="http://schemas.openxmlformats.org/officeDocument/2006/relationships">
+  <p:cSld>
+    <p:spTree>
+      <p:nvGrpSpPr>
+        <p:cNvPr id="1" name=""/>
+        <p:cNvGrpSpPr/>
+        <p:nvPr/>
+      </p:nvGrpSpPr>
+      <p:grpSpPr/>
+      <p:sp>
+        <p:nvSpPr>
+          <p:cNvPr id="23" name="Rect"/>
           <p:cNvSpPr/>
           <p:nvPr/>
         </p:nvSpPr>
         <p:spPr>
           <a:xfrm>
-            <a:off x="685800" y="685800"/>
-            <a:ext cx="7772400" cy="1143000"/>
-          </a:xfrm>
-          <a:prstGeom prst="rect">
-            <a:avLst/>
-          </a:prstGeom>
+            <a:off x="0" y="0"/>
+            <a:ext cx="9144000" cy="6858000"/>
+          </a:xfrm>
+          <a:prstGeom prst="rect">
+            <a:avLst/>
+          </a:prstGeom>
+          <a:solidFill>
+            <a:srgbClr val="E25C4B"/>
+          </a:solidFill>
+          <a:ln>
+            <a:noFill/>
+          </a:ln>
         </p:spPr>
         <p:txBody>
           <a:bodyPr/>
-          <a:p>
-            <a:r>
-              <a:rPr lang="en-US" sz="3600" b="1"/>
-              <a:t>Roadmap</a:t>
-            </a:r>
-          </a:p>
-        </p:txBody>
-      </p:sp>
-      <p:sp>
-        <p:nvSpPr>
-          <p:cNvPr id="3" name="Body"/>
+          <a:lstStyle/>
+          <a:p/>
+        </p:txBody>
+      </p:sp>
+      <p:sp>
+        <p:nvSpPr>
+          <p:cNvPr id="24" name="Rect"/>
           <p:cNvSpPr/>
           <p:nvPr/>
         </p:nvSpPr>
         <p:spPr>
           <a:xfrm>
-            <a:off x="685800" y="2057400"/>
-            <a:ext cx="7772400" cy="3886200"/>
-          </a:xfrm>
-          <a:prstGeom prst="rect">
-            <a:avLst/>
-          </a:prstGeom>
+            <a:off x="640080" y="2148840"/>
+            <a:ext cx="548640" cy="118872"/>
+          </a:xfrm>
+          <a:prstGeom prst="rect">
+            <a:avLst/>
+          </a:prstGeom>
+          <a:solidFill>
+            <a:srgbClr val="FFFFFF"/>
+          </a:solidFill>
+          <a:ln>
+            <a:noFill/>
+          </a:ln>
         </p:spPr>
         <p:txBody>
           <a:bodyPr/>
-          <a:p>
-            <a:r>
-              <a:rPr lang="en-US" sz="2000"/>
-              <a:t>Inline office previews</a:t>
-            </a:r>
-          </a:p>
-          <a:p>
-            <a:r>
-              <a:rPr lang="en-US" sz="2000"/>
-              <a:t>Real-time collaboration</a:t>
-            </a:r>
-          </a:p>
-          <a:p>
-            <a:r>
-              <a:rPr lang="en-US" sz="2000"/>
-              <a:t>Database &amp; kanban views</a:t>
+          <a:lstStyle/>
+          <a:p/>
+        </p:txBody>
+      </p:sp>
+      <p:sp>
+        <p:nvSpPr>
+          <p:cNvPr id="25" name="Txt"/>
+          <p:cNvSpPr txBox="1"/>
+          <p:nvPr/>
+        </p:nvSpPr>
+        <p:spPr>
+          <a:xfrm>
+            <a:off x="640080" y="2468880"/>
+            <a:ext cx="7863840" cy="1280160"/>
+          </a:xfrm>
+          <a:prstGeom prst="rect">
+            <a:avLst/>
+          </a:prstGeom>
+        </p:spPr>
+        <p:txBody>
+          <a:bodyPr wrap="square" anchor="t">
+            <a:normAutofit/>
+          </a:bodyPr>
+          <a:lstStyle/>
+          <a:p>
+            <a:pPr algn="l">
+              <a:spcAft>
+                <a:spcPts val="600"/>
+              </a:spcAft>
+              <a:buNone/>
+            </a:pPr>
+            <a:r>
+              <a:rPr lang="en-US" sz="4600" b="1">
+                <a:solidFill>
+                  <a:srgbClr val="FFFFFF"/>
+                </a:solidFill>
+              </a:rPr>
+              <a:t>Start building with Blok</a:t>
+            </a:r>
+          </a:p>
+        </p:txBody>
+      </p:sp>
+      <p:sp>
+        <p:nvSpPr>
+          <p:cNvPr id="26" name="Txt"/>
+          <p:cNvSpPr txBox="1"/>
+          <p:nvPr/>
+        </p:nvSpPr>
+        <p:spPr>
+          <a:xfrm>
+            <a:off x="640080" y="3794760"/>
+            <a:ext cx="7863840" cy="640080"/>
+          </a:xfrm>
+          <a:prstGeom prst="rect">
+            <a:avLst/>
+          </a:prstGeom>
+        </p:spPr>
+        <p:txBody>
+          <a:bodyPr wrap="square" anchor="t">
+            <a:normAutofit/>
+          </a:bodyPr>
+          <a:lstStyle/>
+          <a:p>
+            <a:pPr algn="l">
+              <a:spcAft>
+                <a:spcPts val="600"/>
+              </a:spcAft>
+              <a:buNone/>
+            </a:pPr>
+            <a:r>
+              <a:rPr lang="en-US" sz="2200">
+                <a:solidFill>
+                  <a:srgbClr val="FFFFFF"/>
+                </a:solidFill>
+              </a:rPr>
+              <a:t>github.com/jackuait/blok</a:t>
             </a:r>
           </a:p>
         </p:txBody>
